--- a/docs/PPT/03-ai-architecture.pptx
+++ b/docs/PPT/03-ai-architecture.pptx
@@ -895,7 +895,7 @@
           <a:lstStyle/>
           <a:p>
             <a:r>
-              <a:t>Prompts are composed from independent, versioned layers. The Adam persona is one reusable layer; system &amp; security layers are non-negotiable and cannot be overridden.</a:t>
+              <a:t>Prompts are composed from independent, versioned layers. The PFF Chat AI persona is one reusable layer; system &amp; security layers are non-negotiable and cannot be overridden.</a:t>
             </a:r>
           </a:p>
         </p:txBody>
@@ -9107,7 +9107,7 @@
                           </a:solidFill>
                           <a:latin typeface="Calibri"/>
                         </a:rPr>
-                        <a:t>Adam persona prompt layer — versioned, reusab…</a:t>
+                        <a:t>PFF Chat AI persona prompt layer — versioned,…</a:t>
                       </a:r>
                     </a:p>
                   </a:txBody>
@@ -14154,7 +14154,7 @@
                 </a:solidFill>
                 <a:latin typeface="Calibri"/>
               </a:rPr>
-              <a:t>Ambiguous or incomplete requests → Adam asks a clarifying question rather than guessing.</a:t>
+              <a:t>Ambiguous or incomplete requests → PFF Chat AI asks a clarifying question rather than guessing.</a:t>
             </a:r>
           </a:p>
           <a:p>
@@ -14204,7 +14204,7 @@
                 </a:solidFill>
                 <a:latin typeface="Calibri"/>
               </a:rPr>
-              <a:t>Transaction-uncertainty policy: on a failed/ambiguous outcome Adam never silently guesses — it states the uncertainty, and reconciliation (deck 02) resolves the true state.</a:t>
+              <a:t>Transaction-uncertainty policy: on a failed/ambiguous outcome PFF Chat AI never silently guesses — it states the uncertainty, and reconciliation (deck 02) resolves the true state.</a:t>
             </a:r>
           </a:p>
           <a:p>
@@ -15056,7 +15056,7 @@
                 </a:solidFill>
                 <a:latin typeface="Calibri"/>
               </a:rPr>
-              <a:t>Adam — versioned, reusable</a:t>
+              <a:t>PFF Chat AI — versioned, reusable</a:t>
             </a:r>
           </a:p>
         </p:txBody>
